--- a/artifacts/speaking-portfolio-expanded/talks/product-engineering/product-engineering-30min-screen.pptx
+++ b/artifacts/speaking-portfolio-expanded/talks/product-engineering/product-engineering-30min-screen.pptx
@@ -6177,7 +6177,7 @@
                 <a:ea typeface="Arial"/>
                 <a:cs typeface="Arial"/>
               </a:rPr>
-              <a:t xml:space="preserve">Four and a half minutes in the 40/30 routes, 3:30 in the 15. Begin with only this slide, never the answer-labelled kit. After the vote open the kit and map B to Pressure copy, C to Clearer first step. Follow economics-product/demo.md. Allow 45 seconds to write the rule.</a:t>
+              <a:t xml:space="preserve">Four and a half minutes in the 40/30 routes, 3:30 in the 15. Begin with only this slide, never the answer-labelled kit. After the vote open the kit and map B to Pressure copy, C to Clearer first step. Follow demo.md. Allow 45 seconds to write the rule.</a:t>
             </a:r>
             <a:endParaRPr lang="en-US" sz="1200"/>
           </a:p>
